--- a/dist/초2/진로·직업/강점발견/초2_진로·직업_강점발견_01_잘하는일찾기.pptx
+++ b/dist/초2/진로·직업/강점발견/초2_진로·직업_강점발견_01_잘하는일찾기.pptx
@@ -114,34 +114,34 @@
   <p:extLst>
     <p:ext uri="{521415D9-36F7-43E2-AB2F-B90AF26B5E84}">
       <p14:sectionLst xmlns:p14="http://schemas.microsoft.com/office/powerpoint/2010/main">
-        <p14:section name="도입" id="{62798594-388a-8776-48c8-45623dad9e57}">
+        <p14:section name="도입" id="{99b1d9e3-cb26-e863-a2ff-d4a26a36367e}">
           <p14:sldIdLst>
             <p14:sldId id="256"/>
             <p14:sldId id="257"/>
           </p14:sldIdLst>
         </p14:section>
-        <p14:section name="개념" id="{0e542978-ac1a-0e40-8e6e-b3fac77c0d31}">
+        <p14:section name="개념" id="{b83a8a19-9e76-332d-67e8-fc9dd57e56ea}">
           <p14:sldIdLst>
             <p14:sldId id="258"/>
           </p14:sldIdLst>
         </p14:section>
-        <p14:section name="연습" id="{4358c27e-9a92-2556-e05c-e8b4ec808c9f}">
+        <p14:section name="연습" id="{8a7a880b-de65-4495-35e8-296eeee49d9f}">
           <p14:sldIdLst>
             <p14:sldId id="259"/>
             <p14:sldId id="260"/>
           </p14:sldIdLst>
         </p14:section>
-        <p14:section name="확인" id="{1e5a8a0d-a083-9ff6-6036-42b440eb4de2}">
+        <p14:section name="확인" id="{e31c6717-a5cb-9bf0-4b62-d2b064b9b8ea}">
           <p14:sldIdLst>
             <p14:sldId id="261"/>
           </p14:sldIdLst>
         </p14:section>
-        <p14:section name="정리" id="{aee8f725-bf5b-d291-7f9e-f49d81114894}">
+        <p14:section name="정리" id="{d398c00d-ab4f-29be-21d9-afc4dbdcac41}">
           <p14:sldIdLst>
             <p14:sldId id="262"/>
           </p14:sldIdLst>
         </p14:section>
-        <p14:section name="보충" id="{a4b1bfda-a281-32eb-750a-33883e7bfb05}">
+        <p14:section name="보충" id="{3fbdbe86-ecfc-0fe0-6f17-6292f1c44bfa}">
           <p14:sldIdLst>
             <p14:sldId id="263"/>
           </p14:sldIdLst>
